--- a/Day-8/ASP_NET_Core.pptx
+++ b/Day-8/ASP_NET_Core.pptx
@@ -6796,7 +6796,7 @@
           <a:p>
             <a:fld id="{5BCAD085-E8A6-8845-BD4E-CB4CCA059FC4}" type="datetimeFigureOut">
               <a:rPr lang="en-US" smtClean="0"/>
-              <a:t>5/22/2026</a:t>
+              <a:t>5/27/2026</a:t>
             </a:fld>
             <a:endParaRPr lang="en-US"/>
           </a:p>
@@ -7003,7 +7003,7 @@
           <a:p>
             <a:fld id="{5BCAD085-E8A6-8845-BD4E-CB4CCA059FC4}" type="datetimeFigureOut">
               <a:rPr lang="en-US" smtClean="0"/>
-              <a:t>5/22/2026</a:t>
+              <a:t>5/27/2026</a:t>
             </a:fld>
             <a:endParaRPr lang="en-US"/>
           </a:p>
@@ -7183,7 +7183,7 @@
           <a:p>
             <a:fld id="{5BCAD085-E8A6-8845-BD4E-CB4CCA059FC4}" type="datetimeFigureOut">
               <a:rPr lang="en-US" smtClean="0"/>
-              <a:t>5/22/2026</a:t>
+              <a:t>5/27/2026</a:t>
             </a:fld>
             <a:endParaRPr lang="en-US"/>
           </a:p>
@@ -7388,7 +7388,7 @@
           <a:p>
             <a:fld id="{5BCAD085-E8A6-8845-BD4E-CB4CCA059FC4}" type="datetimeFigureOut">
               <a:rPr lang="en-US" smtClean="0"/>
-              <a:t>5/22/2026</a:t>
+              <a:t>5/27/2026</a:t>
             </a:fld>
             <a:endParaRPr lang="en-US"/>
           </a:p>
@@ -14126,7 +14126,7 @@
           <a:p>
             <a:fld id="{5BCAD085-E8A6-8845-BD4E-CB4CCA059FC4}" type="datetimeFigureOut">
               <a:rPr lang="en-US" smtClean="0"/>
-              <a:t>5/22/2026</a:t>
+              <a:t>5/27/2026</a:t>
             </a:fld>
             <a:endParaRPr lang="en-US"/>
           </a:p>
@@ -14400,7 +14400,7 @@
           <a:p>
             <a:fld id="{5BCAD085-E8A6-8845-BD4E-CB4CCA059FC4}" type="datetimeFigureOut">
               <a:rPr lang="en-US" smtClean="0"/>
-              <a:t>5/22/2026</a:t>
+              <a:t>5/27/2026</a:t>
             </a:fld>
             <a:endParaRPr lang="en-US"/>
           </a:p>
@@ -14803,7 +14803,7 @@
           <a:p>
             <a:fld id="{5BCAD085-E8A6-8845-BD4E-CB4CCA059FC4}" type="datetimeFigureOut">
               <a:rPr lang="en-US" smtClean="0"/>
-              <a:t>5/22/2026</a:t>
+              <a:t>5/27/2026</a:t>
             </a:fld>
             <a:endParaRPr lang="en-US"/>
           </a:p>
@@ -14921,7 +14921,7 @@
           <a:p>
             <a:fld id="{5BCAD085-E8A6-8845-BD4E-CB4CCA059FC4}" type="datetimeFigureOut">
               <a:rPr lang="en-US" smtClean="0"/>
-              <a:t>5/22/2026</a:t>
+              <a:t>5/27/2026</a:t>
             </a:fld>
             <a:endParaRPr lang="en-US"/>
           </a:p>
@@ -15016,7 +15016,7 @@
           <a:p>
             <a:fld id="{5BCAD085-E8A6-8845-BD4E-CB4CCA059FC4}" type="datetimeFigureOut">
               <a:rPr lang="en-US" smtClean="0"/>
-              <a:t>5/22/2026</a:t>
+              <a:t>5/27/2026</a:t>
             </a:fld>
             <a:endParaRPr lang="en-US"/>
           </a:p>
@@ -15308,7 +15308,7 @@
           <a:p>
             <a:fld id="{5BCAD085-E8A6-8845-BD4E-CB4CCA059FC4}" type="datetimeFigureOut">
               <a:rPr lang="en-US" smtClean="0"/>
-              <a:t>5/22/2026</a:t>
+              <a:t>5/27/2026</a:t>
             </a:fld>
             <a:endParaRPr lang="en-US"/>
           </a:p>
@@ -15588,7 +15588,7 @@
           <a:p>
             <a:fld id="{5BCAD085-E8A6-8845-BD4E-CB4CCA059FC4}" type="datetimeFigureOut">
               <a:rPr lang="en-US" smtClean="0"/>
-              <a:t>5/22/2026</a:t>
+              <a:t>5/27/2026</a:t>
             </a:fld>
             <a:endParaRPr lang="en-US"/>
           </a:p>
@@ -15838,7 +15838,7 @@
           <a:p>
             <a:fld id="{5BCAD085-E8A6-8845-BD4E-CB4CCA059FC4}" type="datetimeFigureOut">
               <a:rPr lang="en-US" smtClean="0"/>
-              <a:t>5/22/2026</a:t>
+              <a:t>5/27/2026</a:t>
             </a:fld>
             <a:endParaRPr lang="en-US"/>
           </a:p>
@@ -25946,7 +25946,7 @@
             </a:pPr>
             <a:r>
               <a:rPr lang="en-US" sz="2800" b="1" dirty="0"/>
-              <a:t>✅ Knowledge Check: Routing</a:t>
+              <a:t>Knowledge Check: Routing</a:t>
             </a:r>
           </a:p>
         </p:txBody>
